--- a/ActivityDashboard.pptx
+++ b/ActivityDashboard.pptx
@@ -7,6 +7,12 @@
   <p:sldIdLst>
     <p:sldId id="256" r:id="rId7"/>
     <p:sldId id="257" r:id="rId9"/>
+    <p:sldId id="258" r:id="rId10"/>
+    <p:sldId id="259" r:id="rId11"/>
+    <p:sldId id="260" r:id="rId12"/>
+    <p:sldId id="261" r:id="rId13"/>
+    <p:sldId id="262" r:id="rId14"/>
+    <p:sldId id="263" r:id="rId15"/>
   </p:sldIdLst>
   <p:sldSz cx="12191695" cy="6858000" type="screen4x3"/>
   <p:notesSz cx="6858000" cy="9144000"/>
@@ -456,146 +462,6 @@
     </a:lvl9pPr>
   </p:notesStyle>
 </p:notesMaster>
-</file>
-
-<file path=ppt/notesSlides/notesSlide1.xml><?xml version="1.0" encoding="utf-8"?>
-<p:notes xmlns:a="http://schemas.openxmlformats.org/drawingml/2006/main" xmlns:p="http://schemas.openxmlformats.org/presentationml/2006/main" xmlns:r="http://schemas.openxmlformats.org/officeDocument/2006/relationships">
-  <p:cSld>
-    <p:spTree>
-      <p:nvGrpSpPr>
-        <p:cNvPr id="1" name=""/>
-        <p:cNvGrpSpPr/>
-        <p:nvPr/>
-      </p:nvGrpSpPr>
-      <p:grpSpPr>
-        <a:xfrm>
-          <a:off x="0" y="0"/>
-          <a:ext cx="0" cy="0"/>
-          <a:chOff x="0" y="0"/>
-          <a:chExt cx="0" cy="0"/>
-        </a:xfrm>
-      </p:grpSpPr>
-      <p:sp>
-        <p:nvSpPr>
-          <p:cNvPr id="2" name="Slide Image Placeholder 1"/>
-          <p:cNvSpPr>
-            <a:spLocks noGrp="1"/>
-          </p:cNvSpPr>
-          <p:nvPr>
-            <p:ph type="sldImg" idx="2"/>
-          </p:nvPr>
-        </p:nvSpPr>
-        <p:spPr/>
-      </p:sp>
-      <p:sp>
-        <p:nvSpPr>
-          <p:cNvPr id="3" name="Notes Placeholder 2"/>
-          <p:cNvSpPr>
-            <a:spLocks noGrp="1"/>
-          </p:cNvSpPr>
-          <p:nvPr>
-            <p:ph type="body" idx="3" sz="quarter"/>
-          </p:nvPr>
-        </p:nvSpPr>
-        <p:spPr/>
-        <p:txBody>
-          <a:bodyPr/>
-          <a:lstStyle/>
-          <a:p>
-            <a:r>
-              <a:t>Generated from ActivityLogger CSV exports. Active time excludes idle and lock-screen rows; 112 rows where idle detection failed are clamped to 2h. See the footer on the slide image for full provenance.</a:t>
-            </a:r>
-          </a:p>
-        </p:txBody>
-      </p:sp>
-      <p:sp>
-        <p:nvSpPr>
-          <p:cNvPr id="4" name="Slide Number Placeholder 3"/>
-          <p:cNvSpPr>
-            <a:spLocks noGrp="1"/>
-          </p:cNvSpPr>
-          <p:nvPr>
-            <p:ph type="sldNum" idx="5" sz="quarter"/>
-          </p:nvPr>
-        </p:nvSpPr>
-        <p:spPr/>
-      </p:sp>
-    </p:spTree>
-  </p:cSld>
-  <p:clrMapOvr>
-    <a:masterClrMapping/>
-  </p:clrMapOvr>
-</p:notes>
-</file>
-
-<file path=ppt/notesSlides/notesSlide2.xml><?xml version="1.0" encoding="utf-8"?>
-<p:notes xmlns:a="http://schemas.openxmlformats.org/drawingml/2006/main" xmlns:p="http://schemas.openxmlformats.org/presentationml/2006/main" xmlns:r="http://schemas.openxmlformats.org/officeDocument/2006/relationships">
-  <p:cSld>
-    <p:spTree>
-      <p:nvGrpSpPr>
-        <p:cNvPr id="1" name=""/>
-        <p:cNvGrpSpPr/>
-        <p:nvPr/>
-      </p:nvGrpSpPr>
-      <p:grpSpPr>
-        <a:xfrm>
-          <a:off x="0" y="0"/>
-          <a:ext cx="0" cy="0"/>
-          <a:chOff x="0" y="0"/>
-          <a:chExt cx="0" cy="0"/>
-        </a:xfrm>
-      </p:grpSpPr>
-      <p:sp>
-        <p:nvSpPr>
-          <p:cNvPr id="2" name="Slide Image Placeholder 1"/>
-          <p:cNvSpPr>
-            <a:spLocks noGrp="1"/>
-          </p:cNvSpPr>
-          <p:nvPr>
-            <p:ph type="sldImg" idx="2"/>
-          </p:nvPr>
-        </p:nvSpPr>
-        <p:spPr/>
-      </p:sp>
-      <p:sp>
-        <p:nvSpPr>
-          <p:cNvPr id="3" name="Notes Placeholder 2"/>
-          <p:cNvSpPr>
-            <a:spLocks noGrp="1"/>
-          </p:cNvSpPr>
-          <p:nvPr>
-            <p:ph type="body" idx="3" sz="quarter"/>
-          </p:nvPr>
-        </p:nvSpPr>
-        <p:spPr/>
-        <p:txBody>
-          <a:bodyPr/>
-          <a:lstStyle/>
-          <a:p>
-            <a:r>
-              <a:t>Generated from ActivityLogger CSV exports. Active time excludes idle and lock-screen rows; 112 rows where idle detection failed are clamped to 2h. See the footer on the slide image for full provenance.</a:t>
-            </a:r>
-          </a:p>
-        </p:txBody>
-      </p:sp>
-      <p:sp>
-        <p:nvSpPr>
-          <p:cNvPr id="4" name="Slide Number Placeholder 3"/>
-          <p:cNvSpPr>
-            <a:spLocks noGrp="1"/>
-          </p:cNvSpPr>
-          <p:nvPr>
-            <p:ph type="sldNum" idx="5" sz="quarter"/>
-          </p:nvPr>
-        </p:nvSpPr>
-        <p:spPr/>
-      </p:sp>
-    </p:spTree>
-  </p:cSld>
-  <p:clrMapOvr>
-    <a:masterClrMapping/>
-  </p:clrMapOvr>
-</p:notes>
 </file>
 
 <file path=ppt/slideLayouts/slideLayout1.xml><?xml version="1.0" encoding="utf-8"?>
@@ -3589,7 +3455,7 @@
       <p:grpSpPr/>
       <p:pic>
         <p:nvPicPr>
-          <p:cNvPr id="2" name="Picture 1" descr="ActivityDashboard.png"/>
+          <p:cNvPr id="2" name="Picture 1" descr="ActivityDashboard-AllPCs.png"/>
           <p:cNvPicPr>
             <a:picLocks noChangeAspect="1"/>
           </p:cNvPicPr>
@@ -3642,7 +3508,7 @@
               </a:defRPr>
             </a:pPr>
             <a:r>
-              <a:t>All time - 27 Jun 2025 to 30 Jul 2026 - 2,989 active hours across 3 PCs</a:t>
+              <a:t>All PCs - 27 Jun 2025 to 2 Aug 2026 - 2,578 active hours across 4 machines, double counting removed (-953 h)</a:t>
             </a:r>
           </a:p>
         </p:txBody>
@@ -3675,7 +3541,7 @@
       <p:grpSpPr/>
       <p:pic>
         <p:nvPicPr>
-          <p:cNvPr id="2" name="Picture 1" descr="ActivityDashboard-2026-07.png"/>
+          <p:cNvPr id="2" name="Picture 1" descr="ActivityDashboard-Weekly.png"/>
           <p:cNvPicPr>
             <a:picLocks noChangeAspect="1"/>
           </p:cNvPicPr>
@@ -3728,7 +3594,523 @@
               </a:defRPr>
             </a:pPr>
             <a:r>
-              <a:t>July 2026 - 127.9 active hours across 2 PCs (HC-D2BYW34 retired 28 Jun)</a:t>
+              <a:t>Week by week, all PCs - 58 weeks, 2,578 active hours, busiest week 74.6 h w/c 16 Mar 2026</a:t>
+            </a:r>
+          </a:p>
+        </p:txBody>
+      </p:sp>
+    </p:spTree>
+  </p:cSld>
+  <p:clrMapOvr>
+    <a:masterClrMapping/>
+  </p:clrMapOvr>
+</p:sld>
+</file>
+
+<file path=ppt/slides/slide3.xml><?xml version="1.0" encoding="utf-8"?>
+<p:sld xmlns:a="http://schemas.openxmlformats.org/drawingml/2006/main" xmlns:p="http://schemas.openxmlformats.org/presentationml/2006/main" xmlns:r="http://schemas.openxmlformats.org/officeDocument/2006/relationships">
+  <p:cSld>
+    <p:bg>
+      <p:bgPr>
+        <a:solidFill>
+          <a:srgbClr val="F9F9F7"/>
+        </a:solidFill>
+        <a:effectLst/>
+      </p:bgPr>
+    </p:bg>
+    <p:spTree>
+      <p:nvGrpSpPr>
+        <p:cNvPr id="1" name=""/>
+        <p:cNvGrpSpPr/>
+        <p:nvPr/>
+      </p:nvGrpSpPr>
+      <p:grpSpPr/>
+      <p:pic>
+        <p:nvPicPr>
+          <p:cNvPr id="2" name="Picture 1" descr="ActivityDashboard-Week-2026-03-16.png"/>
+          <p:cNvPicPr>
+            <a:picLocks noChangeAspect="1"/>
+          </p:cNvPicPr>
+          <p:nvPr/>
+        </p:nvPicPr>
+        <p:blipFill>
+          <a:blip r:embed="rId2"/>
+          <a:stretch>
+            <a:fillRect/>
+          </a:stretch>
+        </p:blipFill>
+        <p:spPr>
+          <a:xfrm>
+            <a:off x="1310291" y="201168"/>
+            <a:ext cx="9571113" cy="6181344"/>
+          </a:xfrm>
+          <a:prstGeom prst="rect">
+            <a:avLst/>
+          </a:prstGeom>
+        </p:spPr>
+      </p:pic>
+      <p:sp>
+        <p:nvSpPr>
+          <p:cNvPr id="3" name="TextBox 2"/>
+          <p:cNvSpPr txBox="1"/>
+          <p:nvPr/>
+        </p:nvSpPr>
+        <p:spPr>
+          <a:xfrm>
+            <a:off x="1310291" y="6437376"/>
+            <a:ext cx="9571113" cy="274320"/>
+          </a:xfrm>
+          <a:prstGeom prst="rect">
+            <a:avLst/>
+          </a:prstGeom>
+          <a:noFill/>
+        </p:spPr>
+        <p:txBody>
+          <a:bodyPr wrap="none">
+            <a:spAutoFit/>
+          </a:bodyPr>
+          <a:lstStyle/>
+          <a:p>
+            <a:pPr>
+              <a:defRPr sz="1100">
+                <a:solidFill>
+                  <a:srgbClr val="898781"/>
+                </a:solidFill>
+                <a:latin typeface="Segoe UI"/>
+              </a:defRPr>
+            </a:pPr>
+            <a:r>
+              <a:t>Week of 16 March 2026 - 74.6 active hours, hour by hour and stacked by PC</a:t>
+            </a:r>
+          </a:p>
+        </p:txBody>
+      </p:sp>
+    </p:spTree>
+  </p:cSld>
+  <p:clrMapOvr>
+    <a:masterClrMapping/>
+  </p:clrMapOvr>
+</p:sld>
+</file>
+
+<file path=ppt/slides/slide4.xml><?xml version="1.0" encoding="utf-8"?>
+<p:sld xmlns:a="http://schemas.openxmlformats.org/drawingml/2006/main" xmlns:p="http://schemas.openxmlformats.org/presentationml/2006/main" xmlns:r="http://schemas.openxmlformats.org/officeDocument/2006/relationships">
+  <p:cSld>
+    <p:bg>
+      <p:bgPr>
+        <a:solidFill>
+          <a:srgbClr val="F9F9F7"/>
+        </a:solidFill>
+        <a:effectLst/>
+      </p:bgPr>
+    </p:bg>
+    <p:spTree>
+      <p:nvGrpSpPr>
+        <p:cNvPr id="1" name=""/>
+        <p:cNvGrpSpPr/>
+        <p:nvPr/>
+      </p:nvGrpSpPr>
+      <p:grpSpPr/>
+      <p:pic>
+        <p:nvPicPr>
+          <p:cNvPr id="2" name="Picture 1" descr="ActivityDashboard-Week-2026-05-18.png"/>
+          <p:cNvPicPr>
+            <a:picLocks noChangeAspect="1"/>
+          </p:cNvPicPr>
+          <p:nvPr/>
+        </p:nvPicPr>
+        <p:blipFill>
+          <a:blip r:embed="rId2"/>
+          <a:stretch>
+            <a:fillRect/>
+          </a:stretch>
+        </p:blipFill>
+        <p:spPr>
+          <a:xfrm>
+            <a:off x="1310291" y="201168"/>
+            <a:ext cx="9571113" cy="6181344"/>
+          </a:xfrm>
+          <a:prstGeom prst="rect">
+            <a:avLst/>
+          </a:prstGeom>
+        </p:spPr>
+      </p:pic>
+      <p:sp>
+        <p:nvSpPr>
+          <p:cNvPr id="3" name="TextBox 2"/>
+          <p:cNvSpPr txBox="1"/>
+          <p:nvPr/>
+        </p:nvSpPr>
+        <p:spPr>
+          <a:xfrm>
+            <a:off x="1310291" y="6437376"/>
+            <a:ext cx="9571113" cy="274320"/>
+          </a:xfrm>
+          <a:prstGeom prst="rect">
+            <a:avLst/>
+          </a:prstGeom>
+          <a:noFill/>
+        </p:spPr>
+        <p:txBody>
+          <a:bodyPr wrap="none">
+            <a:spAutoFit/>
+          </a:bodyPr>
+          <a:lstStyle/>
+          <a:p>
+            <a:pPr>
+              <a:defRPr sz="1100">
+                <a:solidFill>
+                  <a:srgbClr val="898781"/>
+                </a:solidFill>
+                <a:latin typeface="Segoe UI"/>
+              </a:defRPr>
+            </a:pPr>
+            <a:r>
+              <a:t>Week of 18 May 2026 - 67.6 active hours, hour by hour and stacked by PC</a:t>
+            </a:r>
+          </a:p>
+        </p:txBody>
+      </p:sp>
+    </p:spTree>
+  </p:cSld>
+  <p:clrMapOvr>
+    <a:masterClrMapping/>
+  </p:clrMapOvr>
+</p:sld>
+</file>
+
+<file path=ppt/slides/slide5.xml><?xml version="1.0" encoding="utf-8"?>
+<p:sld xmlns:a="http://schemas.openxmlformats.org/drawingml/2006/main" xmlns:p="http://schemas.openxmlformats.org/presentationml/2006/main" xmlns:r="http://schemas.openxmlformats.org/officeDocument/2006/relationships">
+  <p:cSld>
+    <p:bg>
+      <p:bgPr>
+        <a:solidFill>
+          <a:srgbClr val="F9F9F7"/>
+        </a:solidFill>
+        <a:effectLst/>
+      </p:bgPr>
+    </p:bg>
+    <p:spTree>
+      <p:nvGrpSpPr>
+        <p:cNvPr id="1" name=""/>
+        <p:cNvGrpSpPr/>
+        <p:nvPr/>
+      </p:nvGrpSpPr>
+      <p:grpSpPr/>
+      <p:pic>
+        <p:nvPicPr>
+          <p:cNvPr id="2" name="Picture 1" descr="ActivityDashboard-HC-D2BYW34.png"/>
+          <p:cNvPicPr>
+            <a:picLocks noChangeAspect="1"/>
+          </p:cNvPicPr>
+          <p:nvPr/>
+        </p:nvPicPr>
+        <p:blipFill>
+          <a:blip r:embed="rId2"/>
+          <a:stretch>
+            <a:fillRect/>
+          </a:stretch>
+        </p:blipFill>
+        <p:spPr>
+          <a:xfrm>
+            <a:off x="1310291" y="201168"/>
+            <a:ext cx="9571113" cy="6181344"/>
+          </a:xfrm>
+          <a:prstGeom prst="rect">
+            <a:avLst/>
+          </a:prstGeom>
+        </p:spPr>
+      </p:pic>
+      <p:sp>
+        <p:nvSpPr>
+          <p:cNvPr id="3" name="TextBox 2"/>
+          <p:cNvSpPr txBox="1"/>
+          <p:nvPr/>
+        </p:nvSpPr>
+        <p:spPr>
+          <a:xfrm>
+            <a:off x="1310291" y="6437376"/>
+            <a:ext cx="9571113" cy="274320"/>
+          </a:xfrm>
+          <a:prstGeom prst="rect">
+            <a:avLst/>
+          </a:prstGeom>
+          <a:noFill/>
+        </p:spPr>
+        <p:txBody>
+          <a:bodyPr wrap="none">
+            <a:spAutoFit/>
+          </a:bodyPr>
+          <a:lstStyle/>
+          <a:p>
+            <a:pPr>
+              <a:defRPr sz="1100">
+                <a:solidFill>
+                  <a:srgbClr val="898781"/>
+                </a:solidFill>
+                <a:latin typeface="Segoe UI"/>
+              </a:defRPr>
+            </a:pPr>
+            <a:r>
+              <a:t>HC-D2BYW34 - Work Dell Desktop - 27 Jun 2025 to 28 Jun 2026 - 1,329 active hours</a:t>
+            </a:r>
+          </a:p>
+        </p:txBody>
+      </p:sp>
+    </p:spTree>
+  </p:cSld>
+  <p:clrMapOvr>
+    <a:masterClrMapping/>
+  </p:clrMapOvr>
+</p:sld>
+</file>
+
+<file path=ppt/slides/slide6.xml><?xml version="1.0" encoding="utf-8"?>
+<p:sld xmlns:a="http://schemas.openxmlformats.org/drawingml/2006/main" xmlns:p="http://schemas.openxmlformats.org/presentationml/2006/main" xmlns:r="http://schemas.openxmlformats.org/officeDocument/2006/relationships">
+  <p:cSld>
+    <p:bg>
+      <p:bgPr>
+        <a:solidFill>
+          <a:srgbClr val="F9F9F7"/>
+        </a:solidFill>
+        <a:effectLst/>
+      </p:bgPr>
+    </p:bg>
+    <p:spTree>
+      <p:nvGrpSpPr>
+        <p:cNvPr id="1" name=""/>
+        <p:cNvGrpSpPr/>
+        <p:nvPr/>
+      </p:nvGrpSpPr>
+      <p:grpSpPr/>
+      <p:pic>
+        <p:nvPicPr>
+          <p:cNvPr id="2" name="Picture 1" descr="ActivityDashboard-HC-20NXD54.png"/>
+          <p:cNvPicPr>
+            <a:picLocks noChangeAspect="1"/>
+          </p:cNvPicPr>
+          <p:nvPr/>
+        </p:nvPicPr>
+        <p:blipFill>
+          <a:blip r:embed="rId2"/>
+          <a:stretch>
+            <a:fillRect/>
+          </a:stretch>
+        </p:blipFill>
+        <p:spPr>
+          <a:xfrm>
+            <a:off x="1310291" y="201168"/>
+            <a:ext cx="9571113" cy="6181344"/>
+          </a:xfrm>
+          <a:prstGeom prst="rect">
+            <a:avLst/>
+          </a:prstGeom>
+        </p:spPr>
+      </p:pic>
+      <p:sp>
+        <p:nvSpPr>
+          <p:cNvPr id="3" name="TextBox 2"/>
+          <p:cNvSpPr txBox="1"/>
+          <p:nvPr/>
+        </p:nvSpPr>
+        <p:spPr>
+          <a:xfrm>
+            <a:off x="1310291" y="6437376"/>
+            <a:ext cx="9571113" cy="274320"/>
+          </a:xfrm>
+          <a:prstGeom prst="rect">
+            <a:avLst/>
+          </a:prstGeom>
+          <a:noFill/>
+        </p:spPr>
+        <p:txBody>
+          <a:bodyPr wrap="none">
+            <a:spAutoFit/>
+          </a:bodyPr>
+          <a:lstStyle/>
+          <a:p>
+            <a:pPr>
+              <a:defRPr sz="1100">
+                <a:solidFill>
+                  <a:srgbClr val="898781"/>
+                </a:solidFill>
+                <a:latin typeface="Segoe UI"/>
+              </a:defRPr>
+            </a:pPr>
+            <a:r>
+              <a:t>HC-20NXD54 - W11 GEHC Work Laptop - 5 Aug 2025 to 30 Jul 2026 - 1,309 active hours, plus 132 h of RealVNC views counted on the PC being driven</a:t>
+            </a:r>
+          </a:p>
+        </p:txBody>
+      </p:sp>
+    </p:spTree>
+  </p:cSld>
+  <p:clrMapOvr>
+    <a:masterClrMapping/>
+  </p:clrMapOvr>
+</p:sld>
+</file>
+
+<file path=ppt/slides/slide7.xml><?xml version="1.0" encoding="utf-8"?>
+<p:sld xmlns:a="http://schemas.openxmlformats.org/drawingml/2006/main" xmlns:p="http://schemas.openxmlformats.org/presentationml/2006/main" xmlns:r="http://schemas.openxmlformats.org/officeDocument/2006/relationships">
+  <p:cSld>
+    <p:bg>
+      <p:bgPr>
+        <a:solidFill>
+          <a:srgbClr val="F9F9F7"/>
+        </a:solidFill>
+        <a:effectLst/>
+      </p:bgPr>
+    </p:bg>
+    <p:spTree>
+      <p:nvGrpSpPr>
+        <p:cNvPr id="1" name=""/>
+        <p:cNvGrpSpPr/>
+        <p:nvPr/>
+      </p:nvGrpSpPr>
+      <p:grpSpPr/>
+      <p:pic>
+        <p:nvPicPr>
+          <p:cNvPr id="2" name="Picture 1" descr="ActivityDashboard-DESKTOP-GHT99IR.png"/>
+          <p:cNvPicPr>
+            <a:picLocks noChangeAspect="1"/>
+          </p:cNvPicPr>
+          <p:nvPr/>
+        </p:nvPicPr>
+        <p:blipFill>
+          <a:blip r:embed="rId2"/>
+          <a:stretch>
+            <a:fillRect/>
+          </a:stretch>
+        </p:blipFill>
+        <p:spPr>
+          <a:xfrm>
+            <a:off x="1310291" y="201168"/>
+            <a:ext cx="9571113" cy="6181344"/>
+          </a:xfrm>
+          <a:prstGeom prst="rect">
+            <a:avLst/>
+          </a:prstGeom>
+        </p:spPr>
+      </p:pic>
+      <p:sp>
+        <p:nvSpPr>
+          <p:cNvPr id="3" name="TextBox 2"/>
+          <p:cNvSpPr txBox="1"/>
+          <p:nvPr/>
+        </p:nvSpPr>
+        <p:spPr>
+          <a:xfrm>
+            <a:off x="1310291" y="6437376"/>
+            <a:ext cx="9571113" cy="274320"/>
+          </a:xfrm>
+          <a:prstGeom prst="rect">
+            <a:avLst/>
+          </a:prstGeom>
+          <a:noFill/>
+        </p:spPr>
+        <p:txBody>
+          <a:bodyPr wrap="none">
+            <a:spAutoFit/>
+          </a:bodyPr>
+          <a:lstStyle/>
+          <a:p>
+            <a:pPr>
+              <a:defRPr sz="1100">
+                <a:solidFill>
+                  <a:srgbClr val="898781"/>
+                </a:solidFill>
+                <a:latin typeface="Segoe UI"/>
+              </a:defRPr>
+            </a:pPr>
+            <a:r>
+              <a:t>DESKTOP-GHT99IR - home PC - 27 Jun 2025 to 2 Aug 2026 - 766 active hours, plus 617 h of RealVNC views counted on the PC being driven</a:t>
+            </a:r>
+          </a:p>
+        </p:txBody>
+      </p:sp>
+    </p:spTree>
+  </p:cSld>
+  <p:clrMapOvr>
+    <a:masterClrMapping/>
+  </p:clrMapOvr>
+</p:sld>
+</file>
+
+<file path=ppt/slides/slide8.xml><?xml version="1.0" encoding="utf-8"?>
+<p:sld xmlns:a="http://schemas.openxmlformats.org/drawingml/2006/main" xmlns:p="http://schemas.openxmlformats.org/presentationml/2006/main" xmlns:r="http://schemas.openxmlformats.org/officeDocument/2006/relationships">
+  <p:cSld>
+    <p:bg>
+      <p:bgPr>
+        <a:solidFill>
+          <a:srgbClr val="F9F9F7"/>
+        </a:solidFill>
+        <a:effectLst/>
+      </p:bgPr>
+    </p:bg>
+    <p:spTree>
+      <p:nvGrpSpPr>
+        <p:cNvPr id="1" name=""/>
+        <p:cNvGrpSpPr/>
+        <p:nvPr/>
+      </p:nvGrpSpPr>
+      <p:grpSpPr/>
+      <p:pic>
+        <p:nvPicPr>
+          <p:cNvPr id="2" name="Picture 1" descr="ActivityDashboard-HC-41BYW34.png"/>
+          <p:cNvPicPr>
+            <a:picLocks noChangeAspect="1"/>
+          </p:cNvPicPr>
+          <p:nvPr/>
+        </p:nvPicPr>
+        <p:blipFill>
+          <a:blip r:embed="rId2"/>
+          <a:stretch>
+            <a:fillRect/>
+          </a:stretch>
+        </p:blipFill>
+        <p:spPr>
+          <a:xfrm>
+            <a:off x="1310291" y="201168"/>
+            <a:ext cx="9571113" cy="6181344"/>
+          </a:xfrm>
+          <a:prstGeom prst="rect">
+            <a:avLst/>
+          </a:prstGeom>
+        </p:spPr>
+      </p:pic>
+      <p:sp>
+        <p:nvSpPr>
+          <p:cNvPr id="3" name="TextBox 2"/>
+          <p:cNvSpPr txBox="1"/>
+          <p:nvPr/>
+        </p:nvSpPr>
+        <p:spPr>
+          <a:xfrm>
+            <a:off x="1310291" y="6437376"/>
+            <a:ext cx="9571113" cy="274320"/>
+          </a:xfrm>
+          <a:prstGeom prst="rect">
+            <a:avLst/>
+          </a:prstGeom>
+          <a:noFill/>
+        </p:spPr>
+        <p:txBody>
+          <a:bodyPr wrap="none">
+            <a:spAutoFit/>
+          </a:bodyPr>
+          <a:lstStyle/>
+          <a:p>
+            <a:pPr>
+              <a:defRPr sz="1100">
+                <a:solidFill>
+                  <a:srgbClr val="898781"/>
+                </a:solidFill>
+                <a:latin typeface="Segoe UI"/>
+              </a:defRPr>
+            </a:pPr>
+            <a:r>
+              <a:t>HC-41BYW34 - MatLab desktop - 28 Jun 2025 to 26 Jul 2026 - 127 active hours</a:t>
             </a:r>
           </a:p>
         </p:txBody>
